--- a/docs/Frame_Aligner_Verification.pptx
+++ b/docs/Frame_Aligner_Verification.pptx
@@ -11152,7 +11152,7 @@
                 <a:ea typeface="Calibri" pitchFamily="34" charset="-122"/>
                 <a:cs typeface="Calibri" pitchFamily="34" charset="-120"/>
               </a:rPr>
-              <a:t>of 14 coverpoints (98 bins) in the regression; every cover property hit</a:t>
+              <a:t>of 14 coverpoints (102 bins) in the regression; every cover property hit</a:t>
             </a:r>
             <a:endParaRPr lang="en-US" sz="2400" dirty="0"/>
           </a:p>
